--- a/slides/10_Box_Plots_and_Better_Charts.pptx
+++ b/slides/10_Box_Plots_and_Better_Charts.pptx
@@ -129,7 +129,7 @@
   <p:extLst>
     <p:ext uri="{521415D9-36F7-43E2-AB2F-B90AF26B5E84}">
       <p14:sectionLst xmlns:p14="http://schemas.microsoft.com/office/powerpoint/2010/main">
-        <p14:section name="Introduction" id="{4ca73169-f111-24f5-0eca-db98998caf33}">
+        <p14:section name="Introduction" id="{0b1513e7-f00a-3440-630e-e4a6debea8b9}">
           <p14:sldIdLst>
             <p14:sldId id="256"/>
             <p14:sldId id="257"/>
@@ -137,7 +137,7 @@
             <p14:sldId id="259"/>
           </p14:sldIdLst>
         </p14:section>
-        <p14:section name="Box plots" id="{ac064c9d-0da3-1ab9-8452-0cbe638fd1a0}">
+        <p14:section name="Box plots" id="{a348d843-5c72-2454-a4e6-3557a8bcfca3}">
           <p14:sldIdLst>
             <p14:sldId id="260"/>
             <p14:sldId id="261"/>
@@ -147,13 +147,13 @@
             <p14:sldId id="265"/>
           </p14:sldIdLst>
         </p14:section>
-        <p14:section name="Choosing a chart" id="{538866f9-aea8-2842-a076-f5107ebaacf2}">
+        <p14:section name="Choosing a chart" id="{ff40ef5d-f58c-c52c-7596-88ed2510cf18}">
           <p14:sldIdLst>
             <p14:sldId id="266"/>
             <p14:sldId id="267"/>
           </p14:sldIdLst>
         </p14:section>
-        <p14:section name="Making a chart better" id="{c93bd5ba-ecd8-fe19-3f05-1586d7779eec}">
+        <p14:section name="Making a chart better" id="{d52be13a-5cd1-8d0c-c68a-c3a90572d85f}">
           <p14:sldIdLst>
             <p14:sldId id="268"/>
             <p14:sldId id="269"/>
@@ -166,7 +166,7 @@
             <p14:sldId id="276"/>
           </p14:sldIdLst>
         </p14:section>
-        <p14:section name="Wrap up" id="{dda437a0-bc1d-ba09-7abc-2d1eaa063e5c}">
+        <p14:section name="Wrap up" id="{34fe885d-bf9f-2ef6-b6c0-a574296d7bb7}">
           <p14:sldIdLst>
             <p14:sldId id="277"/>
             <p14:sldId id="278"/>
@@ -3509,7 +3509,7 @@
               <a:t>Change </a:t>
             </a:r>
             <a:r>
-              <a:rPr lang="en-US" sz="1800" dirty="0">
+              <a:rPr lang="en-US" sz="1800" b="1" dirty="0">
                 <a:solidFill>
                   <a:srgbClr val="B86E1E"/>
                 </a:solidFill>
@@ -3528,7 +3528,7 @@
               <a:t> to </a:t>
             </a:r>
             <a:r>
-              <a:rPr lang="en-US" sz="1800" dirty="0">
+              <a:rPr lang="en-US" sz="1800" b="1" dirty="0">
                 <a:solidFill>
                   <a:srgbClr val="B86E1E"/>
                 </a:solidFill>
@@ -5479,7 +5479,7 @@
               <a:t>the y-axis says </a:t>
             </a:r>
             <a:r>
-              <a:rPr lang="en-US" sz="1500" dirty="0">
+              <a:rPr lang="en-US" sz="1500" b="1" dirty="0">
                 <a:solidFill>
                   <a:srgbClr val="B86E1E"/>
                 </a:solidFill>
@@ -5525,7 +5525,7 @@
               <a:t>the x-axis label </a:t>
             </a:r>
             <a:r>
-              <a:rPr lang="en-US" sz="1500" dirty="0">
+              <a:rPr lang="en-US" sz="1500" b="1" dirty="0">
                 <a:solidFill>
                   <a:srgbClr val="B86E1E"/>
                 </a:solidFill>
@@ -5571,7 +5571,7 @@
               <a:t>both boxes are the same colour, and </a:t>
             </a:r>
             <a:r>
-              <a:rPr lang="en-US" sz="1500" dirty="0">
+              <a:rPr lang="en-US" sz="1500" b="1" dirty="0">
                 <a:solidFill>
                   <a:srgbClr val="B86E1E"/>
                 </a:solidFill>
@@ -5869,7 +5869,7 @@
                         <a:t>​</a:t>
                       </a:r>
                       <a:r>
-                        <a:rPr lang="en-US" sz="1200" dirty="0">
+                        <a:rPr lang="en-US" sz="1200" b="1" dirty="0">
                           <a:solidFill>
                             <a:srgbClr val="B86E1E"/>
                           </a:solidFill>
@@ -6012,7 +6012,7 @@
                         <a:t>​</a:t>
                       </a:r>
                       <a:r>
-                        <a:rPr lang="en-US" sz="1200" dirty="0">
+                        <a:rPr lang="en-US" sz="1200" b="1" dirty="0">
                           <a:solidFill>
                             <a:srgbClr val="B86E1E"/>
                           </a:solidFill>
@@ -6155,7 +6155,7 @@
                         <a:t>​</a:t>
                       </a:r>
                       <a:r>
-                        <a:rPr lang="en-US" sz="1200" dirty="0">
+                        <a:rPr lang="en-US" sz="1200" b="1" dirty="0">
                           <a:solidFill>
                             <a:srgbClr val="B86E1E"/>
                           </a:solidFill>
@@ -6298,7 +6298,7 @@
                         <a:t>​</a:t>
                       </a:r>
                       <a:r>
-                        <a:rPr lang="en-US" sz="1200" dirty="0">
+                        <a:rPr lang="en-US" sz="1200" b="1" dirty="0">
                           <a:solidFill>
                             <a:srgbClr val="B86E1E"/>
                           </a:solidFill>
@@ -7702,7 +7702,7 @@
               <a:t>With </a:t>
             </a:r>
             <a:r>
-              <a:rPr lang="en-US" sz="1800" dirty="0">
+              <a:rPr lang="en-US" sz="1800" b="1" dirty="0">
                 <a:solidFill>
                   <a:srgbClr val="B86E1E"/>
                 </a:solidFill>
@@ -8700,7 +8700,7 @@
               <a:t>Why do we use </a:t>
             </a:r>
             <a:r>
-              <a:rPr lang="en-US" sz="1800" dirty="0">
+              <a:rPr lang="en-US" sz="1800" b="1" dirty="0">
                 <a:solidFill>
                   <a:srgbClr val="E8A55A"/>
                 </a:solidFill>
@@ -10592,7 +10592,7 @@
               <a:t>A box plot shows the same comparison as our split histogram more simply, with one box per group. So </a:t>
             </a:r>
             <a:r>
-              <a:rPr lang="en-US" sz="1300" dirty="0">
+              <a:rPr lang="en-US" sz="1300" b="1" dirty="0">
                 <a:solidFill>
                   <a:srgbClr val="B86E1E"/>
                 </a:solidFill>
@@ -10611,7 +10611,7 @@
               <a:t> goes on the x-axis and </a:t>
             </a:r>
             <a:r>
-              <a:rPr lang="en-US" sz="1300" dirty="0">
+              <a:rPr lang="en-US" sz="1300" b="1" dirty="0">
                 <a:solidFill>
                   <a:srgbClr val="B86E1E"/>
                 </a:solidFill>
